--- a/Schools_ML_Track/camp_2026/slides/ML/ML23.pptx
+++ b/Schools_ML_Track/camp_2026/slides/ML/ML23.pptx
@@ -126,7 +126,7 @@
   <p:extLst>
     <p:ext uri="{521415D9-36F7-43E2-AB2F-B90AF26B5E84}">
       <p14:sectionLst xmlns:p14="http://schemas.microsoft.com/office/powerpoint/2010/main">
-        <p14:section name="Opening" id="{43585d30-6a97-5b86-8759-6aa164a2f919}">
+        <p14:section name="Opening" id="{16560661-b302-dec0-df11-6b0404307f5f}">
           <p14:sldIdLst>
             <p14:sldId id="256"/>
             <p14:sldId id="257"/>
@@ -136,7 +136,7 @@
             <p14:sldId id="261"/>
           </p14:sldIdLst>
         </p14:section>
-        <p14:section name="Block A" id="{22150f69-e53b-8058-8696-232643fb6627}">
+        <p14:section name="Block A" id="{f2936caa-f4da-62c5-fa85-5af27183d4f0}">
           <p14:sldIdLst>
             <p14:sldId id="262"/>
             <p14:sldId id="263"/>
@@ -146,15 +146,15 @@
             <p14:sldId id="268"/>
           </p14:sldIdLst>
         </p14:section>
-        <p14:section name="Break" id="{b18da050-bc62-00ad-3a9d-40175ea42c88}">
+        <p14:section name="Break" id="{72babc36-1e46-943b-5e38-411d6abb2552}">
           <p14:sldIdLst>
             <p14:sldId id="266"/>
           </p14:sldIdLst>
         </p14:section>
-        <p14:section name="Block A" id="{c2fff804-e004-a099-e73b-fa79190ca1d2}">
+        <p14:section name="Block A" id="{335b4a99-dff0-0a1c-a7af-35a16b89d482}">
           <p14:sldIdLst/>
         </p14:section>
-        <p14:section name="Block B" id="{3730adbc-054b-8356-e6f3-cebe614b52b1}">
+        <p14:section name="Block B" id="{38de8bb5-473a-06b9-fdc9-07c1f17d1a0a}">
           <p14:sldIdLst>
             <p14:sldId id="269"/>
             <p14:sldId id="270"/>
@@ -162,7 +162,7 @@
             <p14:sldId id="272"/>
           </p14:sldIdLst>
         </p14:section>
-        <p14:section name="Make and close" id="{70d62570-3281-4c6c-332d-df611768a338}">
+        <p14:section name="Make and close" id="{d0c61c36-8bfc-9d75-6ff4-c8f06210b86e}">
           <p14:sldIdLst>
             <p14:sldId id="273"/>
             <p14:sldId id="274"/>

--- a/Schools_ML_Track/camp_2026/slides/ML/ML23.pptx
+++ b/Schools_ML_Track/camp_2026/slides/ML/ML23.pptx
@@ -126,7 +126,7 @@
   <p:extLst>
     <p:ext uri="{521415D9-36F7-43E2-AB2F-B90AF26B5E84}">
       <p14:sectionLst xmlns:p14="http://schemas.microsoft.com/office/powerpoint/2010/main">
-        <p14:section name="Opening" id="{16560661-b302-dec0-df11-6b0404307f5f}">
+        <p14:section name="Opening" id="{4d338a9c-bfdc-a0cc-0925-e9bbde94fa33}">
           <p14:sldIdLst>
             <p14:sldId id="256"/>
             <p14:sldId id="257"/>
@@ -136,7 +136,7 @@
             <p14:sldId id="261"/>
           </p14:sldIdLst>
         </p14:section>
-        <p14:section name="Block A" id="{f2936caa-f4da-62c5-fa85-5af27183d4f0}">
+        <p14:section name="Block A" id="{709f2fba-45a0-73bf-0824-c04ef603e085}">
           <p14:sldIdLst>
             <p14:sldId id="262"/>
             <p14:sldId id="263"/>
@@ -146,15 +146,15 @@
             <p14:sldId id="268"/>
           </p14:sldIdLst>
         </p14:section>
-        <p14:section name="Break" id="{72babc36-1e46-943b-5e38-411d6abb2552}">
+        <p14:section name="Break" id="{ca90d844-dc94-903c-451b-6aa9003c5d07}">
           <p14:sldIdLst>
             <p14:sldId id="266"/>
           </p14:sldIdLst>
         </p14:section>
-        <p14:section name="Block A" id="{335b4a99-dff0-0a1c-a7af-35a16b89d482}">
+        <p14:section name="Block A" id="{93227712-ac5a-41f9-1883-01a69c62ad40}">
           <p14:sldIdLst/>
         </p14:section>
-        <p14:section name="Block B" id="{38de8bb5-473a-06b9-fdc9-07c1f17d1a0a}">
+        <p14:section name="Block B" id="{4ce4d9c6-59f4-b556-264e-fbc71a5b0e79}">
           <p14:sldIdLst>
             <p14:sldId id="269"/>
             <p14:sldId id="270"/>
@@ -162,7 +162,7 @@
             <p14:sldId id="272"/>
           </p14:sldIdLst>
         </p14:section>
-        <p14:section name="Make and close" id="{d0c61c36-8bfc-9d75-6ff4-c8f06210b86e}">
+        <p14:section name="Make and close" id="{84f51e49-cf7b-db04-d46e-0022f1af4480}">
           <p14:sldIdLst>
             <p14:sldId id="273"/>
             <p14:sldId id="274"/>
@@ -4898,15 +4898,15 @@
           <a:p>
             <a:pPr algn="l" indent="0" marL="0">
               <a:lnSpc>
-                <a:spcPts val="3600"/>
+                <a:spcPts val="3360"/>
               </a:lnSpc>
               <a:spcAft>
-                <a:spcPts val="2520"/>
+                <a:spcPts val="2020"/>
               </a:spcAft>
               <a:buNone/>
             </a:pPr>
             <a:r>
-              <a:rPr lang="en-US" sz="3000" dirty="0">
+              <a:rPr lang="en-US" sz="2800" dirty="0">
                 <a:solidFill>
                   <a:srgbClr val="111111"/>
                 </a:solidFill>
@@ -4914,22 +4914,22 @@
                 <a:ea typeface="Lato" pitchFamily="34" charset="-122"/>
                 <a:cs typeface="Lato" pitchFamily="34" charset="-120"/>
               </a:rPr>
-              <a:t>Practise defining prediction, feature and target without jargon. Save a screenshot backup of your demonstration and disclose any AI assistance.</a:t>
-            </a:r>
-            <a:endParaRPr lang="en-US" sz="3000" dirty="0"/>
+              <a:t>Practise defining prediction, feature and target without jargon.</a:t>
+            </a:r>
+            <a:endParaRPr lang="en-US" sz="2800" dirty="0"/>
           </a:p>
           <a:p>
             <a:pPr algn="l" indent="0" marL="0">
               <a:lnSpc>
-                <a:spcPts val="3600"/>
+                <a:spcPts val="3360"/>
               </a:lnSpc>
               <a:spcAft>
-                <a:spcPts val="2520"/>
+                <a:spcPts val="2020"/>
               </a:spcAft>
               <a:buNone/>
             </a:pPr>
             <a:r>
-              <a:rPr lang="en-US" sz="3000" dirty="0">
+              <a:rPr lang="en-US" sz="2800" dirty="0">
                 <a:solidFill>
                   <a:srgbClr val="111111"/>
                 </a:solidFill>
@@ -4937,9 +4937,32 @@
                 <a:ea typeface="Lato" pitchFamily="34" charset="-122"/>
                 <a:cs typeface="Lato" pitchFamily="34" charset="-120"/>
               </a:rPr>
-              <a:t>Save it as ML23. Write two sentences: what you changed and how you checked it.</a:t>
-            </a:r>
-            <a:endParaRPr lang="en-US" sz="3000" dirty="0"/>
+              <a:t>Save a screenshot backup of your demonstration and disclose any AI assistance.</a:t>
+            </a:r>
+            <a:endParaRPr lang="en-US" sz="2800" dirty="0"/>
+          </a:p>
+          <a:p>
+            <a:pPr algn="l" indent="0" marL="0">
+              <a:lnSpc>
+                <a:spcPts val="3360"/>
+              </a:lnSpc>
+              <a:spcAft>
+                <a:spcPts val="2020"/>
+              </a:spcAft>
+              <a:buNone/>
+            </a:pPr>
+            <a:r>
+              <a:rPr lang="en-US" sz="2800" dirty="0">
+                <a:solidFill>
+                  <a:srgbClr val="111111"/>
+                </a:solidFill>
+                <a:latin typeface="Lato" pitchFamily="34" charset="0"/>
+                <a:ea typeface="Lato" pitchFamily="34" charset="-122"/>
+                <a:cs typeface="Lato" pitchFamily="34" charset="-120"/>
+              </a:rPr>
+              <a:t>Write two sentences: what you changed and how you checked it.</a:t>
+            </a:r>
+            <a:endParaRPr lang="en-US" sz="2800" dirty="0"/>
           </a:p>
         </p:txBody>
       </p:sp>
